--- a/templates/HD PPT TEMPLATE 1 - Copy.pptx
+++ b/templates/HD PPT TEMPLATE 1 - Copy.pptx
@@ -131,7 +131,7 @@
   <pc:docChgLst>
     <pc:chgData name="Sarthak Sharma" userId="16803c0d-c230-4ae1-bbf2-1439c964a0fd" providerId="ADAL" clId="{55161AFF-56C2-4250-938E-2D0514461C5D}"/>
     <pc:docChg chg="undo custSel delSld modSld">
-      <pc:chgData name="Sarthak Sharma" userId="16803c0d-c230-4ae1-bbf2-1439c964a0fd" providerId="ADAL" clId="{55161AFF-56C2-4250-938E-2D0514461C5D}" dt="2026-06-22T19:33:42.742" v="113" actId="113"/>
+      <pc:chgData name="Sarthak Sharma" userId="16803c0d-c230-4ae1-bbf2-1439c964a0fd" providerId="ADAL" clId="{55161AFF-56C2-4250-938E-2D0514461C5D}" dt="2026-06-22T19:43:10.464" v="131" actId="20577"/>
       <pc:docMkLst>
         <pc:docMk/>
       </pc:docMkLst>
@@ -143,7 +143,7 @@
         </pc:sldMkLst>
       </pc:sldChg>
       <pc:sldChg chg="addSp delSp modSp mod">
-        <pc:chgData name="Sarthak Sharma" userId="16803c0d-c230-4ae1-bbf2-1439c964a0fd" providerId="ADAL" clId="{55161AFF-56C2-4250-938E-2D0514461C5D}" dt="2026-06-22T19:33:42.742" v="113" actId="113"/>
+        <pc:chgData name="Sarthak Sharma" userId="16803c0d-c230-4ae1-bbf2-1439c964a0fd" providerId="ADAL" clId="{55161AFF-56C2-4250-938E-2D0514461C5D}" dt="2026-06-22T19:43:10.464" v="131" actId="20577"/>
         <pc:sldMkLst>
           <pc:docMk/>
           <pc:sldMk cId="3869510425" sldId="260"/>
@@ -157,23 +157,23 @@
           </ac:spMkLst>
         </pc:spChg>
         <pc:spChg chg="add mod">
-          <ac:chgData name="Sarthak Sharma" userId="16803c0d-c230-4ae1-bbf2-1439c964a0fd" providerId="ADAL" clId="{55161AFF-56C2-4250-938E-2D0514461C5D}" dt="2026-06-22T19:32:33.871" v="78" actId="14100"/>
+          <ac:chgData name="Sarthak Sharma" userId="16803c0d-c230-4ae1-bbf2-1439c964a0fd" providerId="ADAL" clId="{55161AFF-56C2-4250-938E-2D0514461C5D}" dt="2026-06-22T19:42:30.129" v="121" actId="404"/>
           <ac:spMkLst>
             <pc:docMk/>
             <pc:sldMk cId="3869510425" sldId="260"/>
             <ac:spMk id="3" creationId="{F887C6F2-2119-6F42-FFB9-9FA864830348}"/>
           </ac:spMkLst>
         </pc:spChg>
-        <pc:spChg chg="add mod">
-          <ac:chgData name="Sarthak Sharma" userId="16803c0d-c230-4ae1-bbf2-1439c964a0fd" providerId="ADAL" clId="{55161AFF-56C2-4250-938E-2D0514461C5D}" dt="2026-06-22T19:32:27.119" v="76" actId="1076"/>
+        <pc:spChg chg="add del mod">
+          <ac:chgData name="Sarthak Sharma" userId="16803c0d-c230-4ae1-bbf2-1439c964a0fd" providerId="ADAL" clId="{55161AFF-56C2-4250-938E-2D0514461C5D}" dt="2026-06-22T19:42:35.408" v="122" actId="478"/>
           <ac:spMkLst>
             <pc:docMk/>
             <pc:sldMk cId="3869510425" sldId="260"/>
             <ac:spMk id="5" creationId="{08A29341-B2E9-FCE3-DC55-4931B43B6CCE}"/>
           </ac:spMkLst>
         </pc:spChg>
-        <pc:spChg chg="add mod">
-          <ac:chgData name="Sarthak Sharma" userId="16803c0d-c230-4ae1-bbf2-1439c964a0fd" providerId="ADAL" clId="{55161AFF-56C2-4250-938E-2D0514461C5D}" dt="2026-06-22T19:32:13.224" v="74" actId="1076"/>
+        <pc:spChg chg="add del mod">
+          <ac:chgData name="Sarthak Sharma" userId="16803c0d-c230-4ae1-bbf2-1439c964a0fd" providerId="ADAL" clId="{55161AFF-56C2-4250-938E-2D0514461C5D}" dt="2026-06-22T19:42:35.408" v="122" actId="478"/>
           <ac:spMkLst>
             <pc:docMk/>
             <pc:sldMk cId="3869510425" sldId="260"/>
@@ -188,12 +188,28 @@
             <ac:spMk id="7" creationId="{3FB6F4F6-420F-9E3F-CA98-9EC395D0E6E9}"/>
           </ac:spMkLst>
         </pc:spChg>
+        <pc:spChg chg="add mod">
+          <ac:chgData name="Sarthak Sharma" userId="16803c0d-c230-4ae1-bbf2-1439c964a0fd" providerId="ADAL" clId="{55161AFF-56C2-4250-938E-2D0514461C5D}" dt="2026-06-22T19:43:07.555" v="129" actId="20577"/>
+          <ac:spMkLst>
+            <pc:docMk/>
+            <pc:sldMk cId="3869510425" sldId="260"/>
+            <ac:spMk id="7" creationId="{B4B700D6-D315-1305-048C-46932F2CD96B}"/>
+          </ac:spMkLst>
+        </pc:spChg>
         <pc:spChg chg="add del mod">
           <ac:chgData name="Sarthak Sharma" userId="16803c0d-c230-4ae1-bbf2-1439c964a0fd" providerId="ADAL" clId="{55161AFF-56C2-4250-938E-2D0514461C5D}" dt="2026-06-22T19:32:08.039" v="73" actId="478"/>
           <ac:spMkLst>
             <pc:docMk/>
             <pc:sldMk cId="3869510425" sldId="260"/>
             <ac:spMk id="8" creationId="{6DA9B4EE-16B3-50A0-E45D-98529B9F76FF}"/>
+          </ac:spMkLst>
+        </pc:spChg>
+        <pc:spChg chg="add mod">
+          <ac:chgData name="Sarthak Sharma" userId="16803c0d-c230-4ae1-bbf2-1439c964a0fd" providerId="ADAL" clId="{55161AFF-56C2-4250-938E-2D0514461C5D}" dt="2026-06-22T19:43:10.464" v="131" actId="20577"/>
+          <ac:spMkLst>
+            <pc:docMk/>
+            <pc:sldMk cId="3869510425" sldId="260"/>
+            <ac:spMk id="8" creationId="{879BC150-229B-946C-6FA8-5B42D9C78783}"/>
           </ac:spMkLst>
         </pc:spChg>
         <pc:spChg chg="add mod">
@@ -2751,7 +2767,7 @@
         <p:spPr>
           <a:xfrm>
             <a:off x="457200" y="1066800"/>
-            <a:ext cx="1828800" cy="1754326"/>
+            <a:ext cx="2438400" cy="2308324"/>
           </a:xfrm>
           <a:prstGeom prst="rect">
             <a:avLst/>
@@ -2766,80 +2782,8 @@
           <a:p>
             <a:pPr algn="ctr"/>
             <a:r>
-              <a:rPr lang="en-US" sz="5400" dirty="0"/>
+              <a:rPr lang="en-US" sz="7200" dirty="0"/>
               <a:t>[Image 1]</a:t>
-            </a:r>
-          </a:p>
-        </p:txBody>
-      </p:sp>
-      <p:sp>
-        <p:nvSpPr>
-          <p:cNvPr id="5" name="TextBox 4">
-            <a:extLst>
-              <a:ext uri="{FF2B5EF4-FFF2-40B4-BE49-F238E27FC236}">
-                <a16:creationId xmlns:a16="http://schemas.microsoft.com/office/drawing/2014/main" id="{08A29341-B2E9-FCE3-DC55-4931B43B6CCE}"/>
-              </a:ext>
-            </a:extLst>
-          </p:cNvPr>
-          <p:cNvSpPr txBox="1"/>
-          <p:nvPr/>
-        </p:nvSpPr>
-        <p:spPr>
-          <a:xfrm>
-            <a:off x="3493008" y="1023698"/>
-            <a:ext cx="1828800" cy="1754326"/>
-          </a:xfrm>
-          <a:prstGeom prst="rect">
-            <a:avLst/>
-          </a:prstGeom>
-          <a:noFill/>
-        </p:spPr>
-        <p:txBody>
-          <a:bodyPr wrap="square" rtlCol="0">
-            <a:spAutoFit/>
-          </a:bodyPr>
-          <a:lstStyle/>
-          <a:p>
-            <a:pPr algn="ctr"/>
-            <a:r>
-              <a:rPr lang="en-US" sz="5400" dirty="0"/>
-              <a:t>[Image 2]</a:t>
-            </a:r>
-          </a:p>
-        </p:txBody>
-      </p:sp>
-      <p:sp>
-        <p:nvSpPr>
-          <p:cNvPr id="6" name="TextBox 5">
-            <a:extLst>
-              <a:ext uri="{FF2B5EF4-FFF2-40B4-BE49-F238E27FC236}">
-                <a16:creationId xmlns:a16="http://schemas.microsoft.com/office/drawing/2014/main" id="{C414B828-6E27-6B62-DCE1-D8E2BE881B81}"/>
-              </a:ext>
-            </a:extLst>
-          </p:cNvPr>
-          <p:cNvSpPr txBox="1"/>
-          <p:nvPr/>
-        </p:nvSpPr>
-        <p:spPr>
-          <a:xfrm>
-            <a:off x="6781800" y="1066800"/>
-            <a:ext cx="1828800" cy="1754326"/>
-          </a:xfrm>
-          <a:prstGeom prst="rect">
-            <a:avLst/>
-          </a:prstGeom>
-          <a:noFill/>
-        </p:spPr>
-        <p:txBody>
-          <a:bodyPr wrap="square" rtlCol="0">
-            <a:spAutoFit/>
-          </a:bodyPr>
-          <a:lstStyle/>
-          <a:p>
-            <a:pPr algn="ctr"/>
-            <a:r>
-              <a:rPr lang="en-US" sz="5400" dirty="0"/>
-              <a:t>[Image 3]</a:t>
             </a:r>
           </a:p>
         </p:txBody>
@@ -2911,6 +2855,78 @@
             <a:r>
               <a:rPr lang="en-US" sz="3600" b="1" dirty="0"/>
               <a:t>[UNITS]</a:t>
+            </a:r>
+          </a:p>
+        </p:txBody>
+      </p:sp>
+      <p:sp>
+        <p:nvSpPr>
+          <p:cNvPr id="7" name="TextBox 6">
+            <a:extLst>
+              <a:ext uri="{FF2B5EF4-FFF2-40B4-BE49-F238E27FC236}">
+                <a16:creationId xmlns:a16="http://schemas.microsoft.com/office/drawing/2014/main" id="{B4B700D6-D315-1305-048C-46932F2CD96B}"/>
+              </a:ext>
+            </a:extLst>
+          </p:cNvPr>
+          <p:cNvSpPr txBox="1"/>
+          <p:nvPr/>
+        </p:nvSpPr>
+        <p:spPr>
+          <a:xfrm>
+            <a:off x="3364992" y="1066800"/>
+            <a:ext cx="2438400" cy="2308324"/>
+          </a:xfrm>
+          <a:prstGeom prst="rect">
+            <a:avLst/>
+          </a:prstGeom>
+          <a:noFill/>
+        </p:spPr>
+        <p:txBody>
+          <a:bodyPr wrap="square" rtlCol="0">
+            <a:spAutoFit/>
+          </a:bodyPr>
+          <a:lstStyle/>
+          <a:p>
+            <a:pPr algn="ctr"/>
+            <a:r>
+              <a:rPr lang="en-US" sz="7200" dirty="0"/>
+              <a:t>[Image 2]</a:t>
+            </a:r>
+          </a:p>
+        </p:txBody>
+      </p:sp>
+      <p:sp>
+        <p:nvSpPr>
+          <p:cNvPr id="8" name="TextBox 7">
+            <a:extLst>
+              <a:ext uri="{FF2B5EF4-FFF2-40B4-BE49-F238E27FC236}">
+                <a16:creationId xmlns:a16="http://schemas.microsoft.com/office/drawing/2014/main" id="{879BC150-229B-946C-6FA8-5B42D9C78783}"/>
+              </a:ext>
+            </a:extLst>
+          </p:cNvPr>
+          <p:cNvSpPr txBox="1"/>
+          <p:nvPr/>
+        </p:nvSpPr>
+        <p:spPr>
+          <a:xfrm>
+            <a:off x="6248400" y="1083113"/>
+            <a:ext cx="2438400" cy="2308324"/>
+          </a:xfrm>
+          <a:prstGeom prst="rect">
+            <a:avLst/>
+          </a:prstGeom>
+          <a:noFill/>
+        </p:spPr>
+        <p:txBody>
+          <a:bodyPr wrap="square" rtlCol="0">
+            <a:spAutoFit/>
+          </a:bodyPr>
+          <a:lstStyle/>
+          <a:p>
+            <a:pPr algn="ctr"/>
+            <a:r>
+              <a:rPr lang="en-US" sz="7200" dirty="0"/>
+              <a:t>[Image 3]</a:t>
             </a:r>
           </a:p>
         </p:txBody>
